--- a/dist/초3/사회·역사/지역과공간/초3_사회·역사_지역과공간_01_우리고장의장소_학생용.pptx
+++ b/dist/초3/사회·역사/지역과공간/초3_사회·역사_지역과공간_01_우리고장의장소_학생용.pptx
@@ -121,13 +121,13 @@
   <p:extLst>
     <p:ext uri="{521415D9-36F7-43E2-AB2F-B90AF26B5E84}">
       <p14:sectionLst xmlns:p14="http://schemas.microsoft.com/office/powerpoint/2010/main">
-        <p14:section name="도입" id="{e7b57acf-a16f-80e5-2083-ed65a7aba404}">
+        <p14:section name="도입" id="{503f9be3-e701-57ba-3f1b-374ca4852570}">
           <p14:sldIdLst>
             <p14:sldId id="256"/>
             <p14:sldId id="257"/>
           </p14:sldIdLst>
         </p14:section>
-        <p14:section name="개념" id="{a3c8127c-f0a8-fa4f-2859-a8271923583f}">
+        <p14:section name="개념" id="{657a4288-1fa8-ee92-da66-b76942a44bcb}">
           <p14:sldIdLst>
             <p14:sldId id="258"/>
             <p14:sldId id="260"/>
@@ -135,7 +135,7 @@
             <p14:sldId id="266"/>
           </p14:sldIdLst>
         </p14:section>
-        <p14:section name="연습" id="{775b6830-f878-e994-83de-069195e7ec72}">
+        <p14:section name="연습" id="{20a69d3a-bba1-6c6c-c524-05c0c87fcae1}">
           <p14:sldIdLst>
             <p14:sldId id="259"/>
             <p14:sldId id="262"/>
@@ -143,34 +143,34 @@
             <p14:sldId id="267"/>
           </p14:sldIdLst>
         </p14:section>
-        <p14:section name="개념" id="{d0c17864-55d7-7338-a3e8-f6fc634cee30}">
+        <p14:section name="개념" id="{09e3bd43-674e-d608-b8a1-4c5181617ae0}">
           <p14:sldIdLst/>
         </p14:section>
-        <p14:section name="연습" id="{a8812a5c-9986-6371-b476-1144a3edd477}">
+        <p14:section name="연습" id="{43252bbe-7cf4-a21d-75a7-3def39c34d6c}">
           <p14:sldIdLst/>
         </p14:section>
-        <p14:section name="확인" id="{ab6d769f-d07c-de5d-23cf-9672fe4aba0d}">
+        <p14:section name="확인" id="{4b1b439f-0fab-772c-9155-17138b7cb7db}">
           <p14:sldIdLst>
             <p14:sldId id="264"/>
             <p14:sldId id="265"/>
             <p14:sldId id="268"/>
           </p14:sldIdLst>
         </p14:section>
-        <p14:section name="개념" id="{e7fbb5b2-2450-d90a-3c9e-afcea14afa26}">
+        <p14:section name="개념" id="{f9896a76-bd6b-ecf7-188a-1c694800e735}">
           <p14:sldIdLst/>
         </p14:section>
-        <p14:section name="연습" id="{b1311c3a-0a2f-d3d1-e1bd-f2a1ae895dfe}">
+        <p14:section name="연습" id="{b7f7209f-4bfd-4c7a-684a-7024c3684dfb}">
           <p14:sldIdLst/>
         </p14:section>
-        <p14:section name="확인" id="{140f232b-0ea8-fa7d-dfed-60d55b2f9fd2}">
+        <p14:section name="확인" id="{1f803c42-46f3-acb4-8930-cda6643488f7}">
           <p14:sldIdLst/>
         </p14:section>
-        <p14:section name="정리" id="{00c499de-6226-7557-03ff-e1c51f2b8d19}">
+        <p14:section name="정리" id="{a2cccf04-43d1-93e7-b0c5-ae012d16e847}">
           <p14:sldIdLst>
             <p14:sldId id="269"/>
           </p14:sldIdLst>
         </p14:section>
-        <p14:section name="보충" id="{5047d2cc-7547-d4cd-d904-d9bb73bc493d}">
+        <p14:section name="보충" id="{02382b62-b40f-376c-5e84-f6b67c28158e}">
           <p14:sldIdLst>
             <p14:sldId id="270"/>
           </p14:sldIdLst>

--- a/dist/초3/사회·역사/지역과공간/초3_사회·역사_지역과공간_01_우리고장의장소_학생용.pptx
+++ b/dist/초3/사회·역사/지역과공간/초3_사회·역사_지역과공간_01_우리고장의장소_학생용.pptx
@@ -121,13 +121,13 @@
   <p:extLst>
     <p:ext uri="{521415D9-36F7-43E2-AB2F-B90AF26B5E84}">
       <p14:sectionLst xmlns:p14="http://schemas.microsoft.com/office/powerpoint/2010/main">
-        <p14:section name="도입" id="{503f9be3-e701-57ba-3f1b-374ca4852570}">
+        <p14:section name="도입" id="{ff9c2fc9-3a12-fc93-1924-8a741c2613b6}">
           <p14:sldIdLst>
             <p14:sldId id="256"/>
             <p14:sldId id="257"/>
           </p14:sldIdLst>
         </p14:section>
-        <p14:section name="개념" id="{657a4288-1fa8-ee92-da66-b76942a44bcb}">
+        <p14:section name="개념" id="{44bbee9e-2ce2-1ef1-153c-2989fbdd996d}">
           <p14:sldIdLst>
             <p14:sldId id="258"/>
             <p14:sldId id="260"/>
@@ -135,7 +135,7 @@
             <p14:sldId id="266"/>
           </p14:sldIdLst>
         </p14:section>
-        <p14:section name="연습" id="{20a69d3a-bba1-6c6c-c524-05c0c87fcae1}">
+        <p14:section name="연습" id="{e3cf6f5a-6a9c-374e-4200-1764471199b7}">
           <p14:sldIdLst>
             <p14:sldId id="259"/>
             <p14:sldId id="262"/>
@@ -143,34 +143,34 @@
             <p14:sldId id="267"/>
           </p14:sldIdLst>
         </p14:section>
-        <p14:section name="개념" id="{09e3bd43-674e-d608-b8a1-4c5181617ae0}">
+        <p14:section name="개념" id="{d4301c9d-c914-99a3-1fea-8a1678f4e0fb}">
           <p14:sldIdLst/>
         </p14:section>
-        <p14:section name="연습" id="{43252bbe-7cf4-a21d-75a7-3def39c34d6c}">
+        <p14:section name="연습" id="{c4d04fe3-147d-4dfe-59f3-bc1a75524d30}">
           <p14:sldIdLst/>
         </p14:section>
-        <p14:section name="확인" id="{4b1b439f-0fab-772c-9155-17138b7cb7db}">
+        <p14:section name="확인" id="{e2cb0aea-b921-9f43-35cf-5da7357b780e}">
           <p14:sldIdLst>
             <p14:sldId id="264"/>
             <p14:sldId id="265"/>
             <p14:sldId id="268"/>
           </p14:sldIdLst>
         </p14:section>
-        <p14:section name="개념" id="{f9896a76-bd6b-ecf7-188a-1c694800e735}">
+        <p14:section name="개념" id="{58583ad9-52dd-18c3-d0bf-8e44070242cb}">
           <p14:sldIdLst/>
         </p14:section>
-        <p14:section name="연습" id="{b7f7209f-4bfd-4c7a-684a-7024c3684dfb}">
+        <p14:section name="연습" id="{15e4ce31-7b0a-6e25-5fc3-c164d33bc375}">
           <p14:sldIdLst/>
         </p14:section>
-        <p14:section name="확인" id="{1f803c42-46f3-acb4-8930-cda6643488f7}">
+        <p14:section name="확인" id="{18498e27-b5bd-8e17-f90c-910c2e38c424}">
           <p14:sldIdLst/>
         </p14:section>
-        <p14:section name="정리" id="{a2cccf04-43d1-93e7-b0c5-ae012d16e847}">
+        <p14:section name="정리" id="{2685c76e-0d7d-7566-3933-204a2fe9a780}">
           <p14:sldIdLst>
             <p14:sldId id="269"/>
           </p14:sldIdLst>
         </p14:section>
-        <p14:section name="보충" id="{02382b62-b40f-376c-5e84-f6b67c28158e}">
+        <p14:section name="보충" id="{3d3bd900-a0f9-4c8d-13ae-57e6982b413a}">
           <p14:sldIdLst>
             <p14:sldId id="270"/>
           </p14:sldIdLst>

--- a/dist/초3/사회·역사/지역과공간/초3_사회·역사_지역과공간_01_우리고장의장소_학생용.pptx
+++ b/dist/초3/사회·역사/지역과공간/초3_사회·역사_지역과공간_01_우리고장의장소_학생용.pptx
@@ -121,13 +121,13 @@
   <p:extLst>
     <p:ext uri="{521415D9-36F7-43E2-AB2F-B90AF26B5E84}">
       <p14:sectionLst xmlns:p14="http://schemas.microsoft.com/office/powerpoint/2010/main">
-        <p14:section name="도입" id="{ff9c2fc9-3a12-fc93-1924-8a741c2613b6}">
+        <p14:section name="도입" id="{73597a00-999e-26bf-cec1-4cbbcc2602fc}">
           <p14:sldIdLst>
             <p14:sldId id="256"/>
             <p14:sldId id="257"/>
           </p14:sldIdLst>
         </p14:section>
-        <p14:section name="개념" id="{44bbee9e-2ce2-1ef1-153c-2989fbdd996d}">
+        <p14:section name="개념" id="{2df24f70-1bd4-fd6c-8288-2912525c85ca}">
           <p14:sldIdLst>
             <p14:sldId id="258"/>
             <p14:sldId id="260"/>
@@ -135,7 +135,7 @@
             <p14:sldId id="266"/>
           </p14:sldIdLst>
         </p14:section>
-        <p14:section name="연습" id="{e3cf6f5a-6a9c-374e-4200-1764471199b7}">
+        <p14:section name="연습" id="{00be7652-e1d8-cfb9-a890-fcb64ff48ddc}">
           <p14:sldIdLst>
             <p14:sldId id="259"/>
             <p14:sldId id="262"/>
@@ -143,34 +143,34 @@
             <p14:sldId id="267"/>
           </p14:sldIdLst>
         </p14:section>
-        <p14:section name="개념" id="{d4301c9d-c914-99a3-1fea-8a1678f4e0fb}">
+        <p14:section name="개념" id="{99fe6851-0d8f-b4fe-2b52-384e645c28e5}">
           <p14:sldIdLst/>
         </p14:section>
-        <p14:section name="연습" id="{c4d04fe3-147d-4dfe-59f3-bc1a75524d30}">
+        <p14:section name="연습" id="{3c054673-7aee-35de-3792-2729204c5530}">
           <p14:sldIdLst/>
         </p14:section>
-        <p14:section name="확인" id="{e2cb0aea-b921-9f43-35cf-5da7357b780e}">
+        <p14:section name="확인" id="{95f2b182-b53f-c779-3f63-799bcea73082}">
           <p14:sldIdLst>
             <p14:sldId id="264"/>
             <p14:sldId id="265"/>
             <p14:sldId id="268"/>
           </p14:sldIdLst>
         </p14:section>
-        <p14:section name="개념" id="{58583ad9-52dd-18c3-d0bf-8e44070242cb}">
+        <p14:section name="개념" id="{b60aa8f6-9c8c-b5cf-a977-efb4050090d2}">
           <p14:sldIdLst/>
         </p14:section>
-        <p14:section name="연습" id="{15e4ce31-7b0a-6e25-5fc3-c164d33bc375}">
+        <p14:section name="연습" id="{5b4d3a6b-ba8f-cec4-45b2-c40a2939f831}">
           <p14:sldIdLst/>
         </p14:section>
-        <p14:section name="확인" id="{18498e27-b5bd-8e17-f90c-910c2e38c424}">
+        <p14:section name="확인" id="{d41eab64-0080-b6de-8790-7f5d51a51424}">
           <p14:sldIdLst/>
         </p14:section>
-        <p14:section name="정리" id="{2685c76e-0d7d-7566-3933-204a2fe9a780}">
+        <p14:section name="정리" id="{fd907e03-6178-1fe8-3720-f3643ec4d1b3}">
           <p14:sldIdLst>
             <p14:sldId id="269"/>
           </p14:sldIdLst>
         </p14:section>
-        <p14:section name="보충" id="{3d3bd900-a0f9-4c8d-13ae-57e6982b413a}">
+        <p14:section name="보충" id="{0a6d9892-ea01-d4e3-f841-bc28e02c627a}">
           <p14:sldIdLst>
             <p14:sldId id="270"/>
           </p14:sldIdLst>
